--- a/baocao.pptx
+++ b/baocao.pptx
@@ -164,28 +164,8 @@
 <file path=ppt/authors.xml><?xml version="1.0" encoding="utf-8"?>
 <p188:authorLst xmlns:a="http://schemas.openxmlformats.org/drawingml/2006/main" xmlns:r="http://schemas.openxmlformats.org/officeDocument/2006/relationships" xmlns:p188="http://schemas.microsoft.com/office/powerpoint/2018/8/main">
   <p188:author id="{13F3A873-5E73-AF47-5168-60E826C34ABE}" name="Administrator" initials="A" userId="Administrator" providerId="None"/>
+  <p188:author id="{E20E30FB-FDD4-3F3F-226B-97BBC10D6074}" name="NGUYỄN ĐÌNH TUẤN" initials="NĐT" userId="S::225748020110138@vinhuni.edu.vn::0ea88a28-be34-44ff-b601-f257fd69f996" providerId="AD"/>
 </p188:authorLst>
-</file>
-
-<file path=ppt/comments/modernComment_101_0.xml><?xml version="1.0" encoding="utf-8"?>
-<p188:cmLst xmlns:a="http://schemas.openxmlformats.org/drawingml/2006/main" xmlns:r="http://schemas.openxmlformats.org/officeDocument/2006/relationships" xmlns:p188="http://schemas.microsoft.com/office/powerpoint/2018/8/main">
-  <p188:cm id="{1DBAB992-CCCD-488F-B5A2-6412F1686AEE}" authorId="{13F3A873-5E73-AF47-5168-60E826C34ABE}" created="2025-12-08T07:17:21.117">
-    <pc:sldMkLst xmlns:pc="http://schemas.microsoft.com/office/powerpoint/2013/main/command">
-      <pc:docMk/>
-      <pc:sldMk cId="0" sldId="257"/>
-    </pc:sldMkLst>
-    <p188:txBody>
-      <a:bodyPr/>
-      <a:lstStyle/>
-      <a:p>
-        <a:r>
-          <a:rPr lang="en-US"/>
-          <a:t>Thêm Logo của Phenikaa và Orlab</a:t>
-        </a:r>
-      </a:p>
-    </p188:txBody>
-  </p188:cm>
-</p188:cmLst>
 </file>
 
 <file path=ppt/handoutMasters/handoutMaster1.xml><?xml version="1.0" encoding="utf-8"?>
@@ -270,7 +250,7 @@
           <a:p>
             <a:fld id="{3E6BA238-A58C-4079-8897-443376D61BE7}" type="datetimeFigureOut">
               <a:rPr lang="en-US" smtClean="0"/>
-              <a:t>4/21/2026</a:t>
+              <a:t>4/22/26</a:t>
             </a:fld>
             <a:endParaRPr lang="en-US"/>
           </a:p>
@@ -437,7 +417,7 @@
             <a:fld id="{E9897A2D-CCBE-0F41-A1E8-ACBA3362F021}" type="datetimeFigureOut">
               <a:rPr lang="en-US" smtClean="0"/>
               <a:pPr/>
-              <a:t>4/21/2026</a:t>
+              <a:t>4/22/26</a:t>
             </a:fld>
             <a:endParaRPr lang="en-US"/>
           </a:p>
@@ -3129,7 +3109,7 @@
           <a:p>
             <a:fld id="{40CEA0DB-F637-4F86-97B3-0F90DEBF0595}" type="datetime1">
               <a:rPr lang="en-US" smtClean="0"/>
-              <a:t>4/21/2026</a:t>
+              <a:t>4/22/26</a:t>
             </a:fld>
             <a:endParaRPr lang="en-US"/>
           </a:p>
@@ -3309,7 +3289,7 @@
           <a:p>
             <a:fld id="{F2891E7F-8654-49A2-8C51-E42B5C71090B}" type="datetime1">
               <a:rPr lang="en-US" smtClean="0"/>
-              <a:t>4/21/2026</a:t>
+              <a:t>4/22/26</a:t>
             </a:fld>
             <a:endParaRPr lang="en-US"/>
           </a:p>
@@ -3499,7 +3479,7 @@
           <a:p>
             <a:fld id="{5CBC92BA-FD1A-4637-9861-D9A2B25A57AB}" type="datetime1">
               <a:rPr lang="en-US" smtClean="0"/>
-              <a:t>4/21/2026</a:t>
+              <a:t>4/22/26</a:t>
             </a:fld>
             <a:endParaRPr lang="en-US"/>
           </a:p>
@@ -3982,7 +3962,7 @@
           <a:p>
             <a:fld id="{9F42534C-D881-4337-BD56-E6DB179428CF}" type="datetime1">
               <a:rPr lang="en-US" smtClean="0"/>
-              <a:t>4/21/2026</a:t>
+              <a:t>4/22/26</a:t>
             </a:fld>
             <a:endParaRPr lang="en-US"/>
           </a:p>
@@ -4239,7 +4219,7 @@
           <a:p>
             <a:fld id="{48B32ED3-EBBD-45F9-B8B1-1A9B6C85A7E4}" type="datetime1">
               <a:rPr lang="en-US" smtClean="0"/>
-              <a:t>4/21/2026</a:t>
+              <a:t>4/22/26</a:t>
             </a:fld>
             <a:endParaRPr lang="en-US"/>
           </a:p>
@@ -4782,7 +4762,7 @@
           <a:p>
             <a:fld id="{D9EC465C-97D2-40C2-B70A-653E7DC7C5A8}" type="datetime1">
               <a:rPr lang="en-US" smtClean="0"/>
-              <a:t>4/21/2026</a:t>
+              <a:t>4/22/26</a:t>
             </a:fld>
             <a:endParaRPr lang="en-US"/>
           </a:p>
@@ -5213,7 +5193,7 @@
           <a:p>
             <a:fld id="{3B76EEF6-5664-4BA3-BA14-0181F30D58D6}" type="datetime1">
               <a:rPr lang="en-US" smtClean="0"/>
-              <a:t>4/21/2026</a:t>
+              <a:t>4/22/26</a:t>
             </a:fld>
             <a:endParaRPr lang="en-US"/>
           </a:p>
@@ -5342,7 +5322,7 @@
           <a:p>
             <a:fld id="{650B2F76-9F20-49EA-8646-ECCAFC8D7F5D}" type="datetime1">
               <a:rPr lang="en-US" smtClean="0"/>
-              <a:t>4/21/2026</a:t>
+              <a:t>4/22/26</a:t>
             </a:fld>
             <a:endParaRPr lang="en-US"/>
           </a:p>
@@ -5449,7 +5429,7 @@
           <a:p>
             <a:fld id="{B6AA442C-775F-4254-8C9C-711D63E60AD6}" type="datetime1">
               <a:rPr lang="en-US" smtClean="0"/>
-              <a:t>4/21/2026</a:t>
+              <a:t>4/22/26</a:t>
             </a:fld>
             <a:endParaRPr lang="en-US"/>
           </a:p>
@@ -5736,7 +5716,7 @@
           <a:p>
             <a:fld id="{FC798200-83E1-452C-8B10-B88EA23E2DE9}" type="datetime1">
               <a:rPr lang="en-US" smtClean="0"/>
-              <a:t>4/21/2026</a:t>
+              <a:t>4/22/26</a:t>
             </a:fld>
             <a:endParaRPr lang="en-US"/>
           </a:p>
@@ -6006,7 +5986,7 @@
           <a:p>
             <a:fld id="{B1F58238-4F4B-4E1D-B04F-89F9977A3706}" type="datetime1">
               <a:rPr lang="en-US" smtClean="0"/>
-              <a:t>4/21/2026</a:t>
+              <a:t>4/22/26</a:t>
             </a:fld>
             <a:endParaRPr lang="en-US"/>
           </a:p>
@@ -6264,7 +6244,7 @@
           <a:p>
             <a:fld id="{2F43B2A6-C40A-44E1-B411-9DE670901985}" type="datetime1">
               <a:rPr lang="en-US" smtClean="0"/>
-              <a:t>4/21/2026</a:t>
+              <a:t>4/22/26</a:t>
             </a:fld>
             <a:endParaRPr lang="en-US"/>
           </a:p>
@@ -6902,7 +6882,7 @@
           <p:nvPr/>
         </p:nvPicPr>
         <p:blipFill>
-          <a:blip r:embed="rId4"/>
+          <a:blip r:embed="rId3"/>
           <a:stretch>
             <a:fillRect/>
           </a:stretch>
@@ -6932,7 +6912,7 @@
           <p:nvPr/>
         </p:nvPicPr>
         <p:blipFill>
-          <a:blip r:embed="rId5">
+          <a:blip r:embed="rId4">
             <a:extLst>
               <a:ext uri="{28A0092B-C50C-407E-A947-70E740481C1C}">
                 <a14:useLocalDpi xmlns:a14="http://schemas.microsoft.com/office/drawing/2010/main" val="0"/>
@@ -7443,11 +7423,6 @@
   <p:clrMapOvr>
     <a:masterClrMapping/>
   </p:clrMapOvr>
-  <p:extLst>
-    <p:ext uri="{6950BFC3-D8DA-4A85-94F7-54DA5524770B}">
-      <p188:commentRel xmlns:p188="http://schemas.microsoft.com/office/powerpoint/2018/8/main" r:id="rId3"/>
-    </p:ext>
-  </p:extLst>
 </p:sld>
 </file>
 
@@ -9003,7 +8978,7 @@
         </p:blipFill>
         <p:spPr>
           <a:xfrm>
-            <a:off x="4923310" y="3729875"/>
+            <a:off x="5094760" y="3758450"/>
             <a:ext cx="142895" cy="342948"/>
           </a:xfrm>
           <a:prstGeom prst="rect">
@@ -9034,7 +9009,7 @@
         </p:blipFill>
         <p:spPr>
           <a:xfrm>
-            <a:off x="2597251" y="3655242"/>
+            <a:off x="2797276" y="3701296"/>
             <a:ext cx="1347171" cy="638264"/>
           </a:xfrm>
           <a:prstGeom prst="rect">
@@ -9064,7 +9039,7 @@
         </p:blipFill>
         <p:spPr>
           <a:xfrm>
-            <a:off x="6317205" y="3782270"/>
+            <a:off x="6479130" y="3839420"/>
             <a:ext cx="276264" cy="238158"/>
           </a:xfrm>
           <a:prstGeom prst="rect">
